--- a/profile/intro.pptx
+++ b/profile/intro.pptx
@@ -4988,8 +4988,8 @@
         </p:nvSpPr>
         <p:spPr>
           <a:xfrm>
-            <a:off x="9301659" y="896796"/>
-            <a:ext cx="1755225" cy="923330"/>
+            <a:off x="9301659" y="987614"/>
+            <a:ext cx="1755225" cy="646331"/>
           </a:xfrm>
           <a:prstGeom prst="rect">
             <a:avLst/>
@@ -5012,21 +5012,7 @@
                   </a:schemeClr>
                 </a:solidFill>
               </a:rPr>
-              <a:t>Business </a:t>
-            </a:r>
-          </a:p>
-          <a:p>
-            <a:pPr algn="ctr"/>
-            <a:r>
-              <a:rPr lang="en-TW" dirty="0">
-                <a:solidFill>
-                  <a:schemeClr val="tx1">
-                    <a:lumMod val="65000"/>
-                    <a:lumOff val="35000"/>
-                  </a:schemeClr>
-                </a:solidFill>
-              </a:rPr>
-              <a:t>Logic </a:t>
+              <a:t>Gateway</a:t>
             </a:r>
           </a:p>
           <a:p>
@@ -5059,7 +5045,7 @@
         </p:nvSpPr>
         <p:spPr>
           <a:xfrm>
-            <a:off x="9301659" y="3194504"/>
+            <a:off x="9301659" y="3247413"/>
             <a:ext cx="1755225" cy="646331"/>
           </a:xfrm>
           <a:prstGeom prst="rect">
@@ -5455,8 +5441,8 @@
         </p:nvSpPr>
         <p:spPr>
           <a:xfrm>
-            <a:off x="1006363" y="1588349"/>
-            <a:ext cx="1114097" cy="1048460"/>
+            <a:off x="1110156" y="1817823"/>
+            <a:ext cx="885494" cy="833326"/>
           </a:xfrm>
           <a:prstGeom prst="cube">
             <a:avLst/>
@@ -5512,8 +5498,8 @@
         </p:nvSpPr>
         <p:spPr>
           <a:xfrm>
-            <a:off x="948557" y="2084420"/>
-            <a:ext cx="1145626" cy="307777"/>
+            <a:off x="1052349" y="2165518"/>
+            <a:ext cx="910554" cy="307777"/>
           </a:xfrm>
           <a:prstGeom prst="rect">
             <a:avLst/>
@@ -5552,8 +5538,8 @@
         </p:nvSpPr>
         <p:spPr>
           <a:xfrm>
-            <a:off x="1006363" y="3175411"/>
-            <a:ext cx="1114097" cy="1048460"/>
+            <a:off x="1110156" y="2989023"/>
+            <a:ext cx="885494" cy="833326"/>
           </a:xfrm>
           <a:prstGeom prst="cube">
             <a:avLst/>
@@ -5609,8 +5595,8 @@
         </p:nvSpPr>
         <p:spPr>
           <a:xfrm>
-            <a:off x="948557" y="3671482"/>
-            <a:ext cx="1145626" cy="307777"/>
+            <a:off x="1052349" y="3336718"/>
+            <a:ext cx="910554" cy="307777"/>
           </a:xfrm>
           <a:prstGeom prst="rect">
             <a:avLst/>
@@ -5649,8 +5635,8 @@
         </p:nvSpPr>
         <p:spPr>
           <a:xfrm>
-            <a:off x="1006363" y="4520735"/>
-            <a:ext cx="1114097" cy="1048460"/>
+            <a:off x="1110156" y="4160223"/>
+            <a:ext cx="885494" cy="833326"/>
           </a:xfrm>
           <a:prstGeom prst="cube">
             <a:avLst/>
@@ -5706,8 +5692,173 @@
         </p:nvSpPr>
         <p:spPr>
           <a:xfrm>
-            <a:off x="948557" y="5016806"/>
-            <a:ext cx="1145626" cy="307777"/>
+            <a:off x="1052349" y="4507918"/>
+            <a:ext cx="910554" cy="307777"/>
+          </a:xfrm>
+          <a:prstGeom prst="rect">
+            <a:avLst/>
+          </a:prstGeom>
+          <a:noFill/>
+        </p:spPr>
+        <p:txBody>
+          <a:bodyPr wrap="square" rtlCol="0">
+            <a:spAutoFit/>
+          </a:bodyPr>
+          <a:lstStyle/>
+          <a:p>
+            <a:pPr algn="ctr"/>
+            <a:r>
+              <a:rPr lang="en-TW" sz="1400" dirty="0">
+                <a:solidFill>
+                  <a:schemeClr val="bg1"/>
+                </a:solidFill>
+              </a:rPr>
+              <a:t>xxl</a:t>
+            </a:r>
+          </a:p>
+        </p:txBody>
+      </p:sp>
+      <p:sp>
+        <p:nvSpPr>
+          <p:cNvPr id="2" name="TextBox 1">
+            <a:extLst>
+              <a:ext uri="{FF2B5EF4-FFF2-40B4-BE49-F238E27FC236}">
+                <a16:creationId xmlns:a16="http://schemas.microsoft.com/office/drawing/2014/main" id="{2780F198-0C7A-FE5A-F34D-50379F45EE77}"/>
+              </a:ext>
+            </a:extLst>
+          </p:cNvPr>
+          <p:cNvSpPr txBox="1"/>
+          <p:nvPr/>
+        </p:nvSpPr>
+        <p:spPr>
+          <a:xfrm>
+            <a:off x="683175" y="896796"/>
+            <a:ext cx="1755225" cy="646331"/>
+          </a:xfrm>
+          <a:prstGeom prst="rect">
+            <a:avLst/>
+          </a:prstGeom>
+          <a:noFill/>
+        </p:spPr>
+        <p:txBody>
+          <a:bodyPr wrap="square" rtlCol="0">
+            <a:spAutoFit/>
+          </a:bodyPr>
+          <a:lstStyle/>
+          <a:p>
+            <a:pPr algn="ctr"/>
+            <a:r>
+              <a:rPr lang="en-US" dirty="0">
+                <a:solidFill>
+                  <a:schemeClr val="tx1">
+                    <a:lumMod val="65000"/>
+                    <a:lumOff val="35000"/>
+                  </a:schemeClr>
+                </a:solidFill>
+              </a:rPr>
+              <a:t>P</a:t>
+            </a:r>
+            <a:r>
+              <a:rPr lang="en-TW" dirty="0">
+                <a:solidFill>
+                  <a:schemeClr val="tx1">
+                    <a:lumMod val="65000"/>
+                    <a:lumOff val="35000"/>
+                  </a:schemeClr>
+                </a:solidFill>
+              </a:rPr>
+              <a:t>latform</a:t>
+            </a:r>
+          </a:p>
+          <a:p>
+            <a:pPr algn="ctr"/>
+            <a:r>
+              <a:rPr lang="en-TW" dirty="0">
+                <a:solidFill>
+                  <a:schemeClr val="tx1">
+                    <a:lumMod val="65000"/>
+                    <a:lumOff val="35000"/>
+                  </a:schemeClr>
+                </a:solidFill>
+              </a:rPr>
+              <a:t>Service</a:t>
+            </a:r>
+          </a:p>
+        </p:txBody>
+      </p:sp>
+      <p:sp>
+        <p:nvSpPr>
+          <p:cNvPr id="3" name="Cube 2">
+            <a:extLst>
+              <a:ext uri="{FF2B5EF4-FFF2-40B4-BE49-F238E27FC236}">
+                <a16:creationId xmlns:a16="http://schemas.microsoft.com/office/drawing/2014/main" id="{70CF97DA-5C28-A542-99FA-58668F6657F4}"/>
+              </a:ext>
+            </a:extLst>
+          </p:cNvPr>
+          <p:cNvSpPr/>
+          <p:nvPr/>
+        </p:nvSpPr>
+        <p:spPr>
+          <a:xfrm>
+            <a:off x="1110156" y="5339584"/>
+            <a:ext cx="885494" cy="833326"/>
+          </a:xfrm>
+          <a:prstGeom prst="cube">
+            <a:avLst/>
+          </a:prstGeom>
+          <a:solidFill>
+            <a:schemeClr val="accent1">
+              <a:lumMod val="40000"/>
+              <a:lumOff val="60000"/>
+            </a:schemeClr>
+          </a:solidFill>
+          <a:ln>
+            <a:solidFill>
+              <a:schemeClr val="bg1"/>
+            </a:solidFill>
+          </a:ln>
+        </p:spPr>
+        <p:style>
+          <a:lnRef idx="2">
+            <a:schemeClr val="accent1">
+              <a:shade val="15000"/>
+            </a:schemeClr>
+          </a:lnRef>
+          <a:fillRef idx="1">
+            <a:schemeClr val="accent1"/>
+          </a:fillRef>
+          <a:effectRef idx="0">
+            <a:schemeClr val="accent1"/>
+          </a:effectRef>
+          <a:fontRef idx="minor">
+            <a:schemeClr val="lt1"/>
+          </a:fontRef>
+        </p:style>
+        <p:txBody>
+          <a:bodyPr rtlCol="0" anchor="ctr"/>
+          <a:lstStyle/>
+          <a:p>
+            <a:pPr algn="ctr"/>
+            <a:endParaRPr lang="en-TW"/>
+          </a:p>
+        </p:txBody>
+      </p:sp>
+      <p:sp>
+        <p:nvSpPr>
+          <p:cNvPr id="5" name="TextBox 4">
+            <a:extLst>
+              <a:ext uri="{FF2B5EF4-FFF2-40B4-BE49-F238E27FC236}">
+                <a16:creationId xmlns:a16="http://schemas.microsoft.com/office/drawing/2014/main" id="{79827D5C-FE8D-E4F8-02A9-1D4214E6CFD6}"/>
+              </a:ext>
+            </a:extLst>
+          </p:cNvPr>
+          <p:cNvSpPr txBox="1"/>
+          <p:nvPr/>
+        </p:nvSpPr>
+        <p:spPr>
+          <a:xfrm>
+            <a:off x="1052349" y="5687279"/>
+            <a:ext cx="910554" cy="307777"/>
           </a:xfrm>
           <a:prstGeom prst="rect">
             <a:avLst/>

--- a/profile/intro.pptx
+++ b/profile/intro.pptx
@@ -6,7 +6,8 @@
   </p:sldMasterIdLst>
   <p:sldIdLst>
     <p:sldId id="256" r:id="rId2"/>
-    <p:sldId id="257" r:id="rId3"/>
+    <p:sldId id="258" r:id="rId3"/>
+    <p:sldId id="257" r:id="rId4"/>
   </p:sldIdLst>
   <p:sldSz cx="12192000" cy="6858000"/>
   <p:notesSz cx="6858000" cy="9144000"/>
@@ -3702,6 +3703,136 @@
 </file>
 
 <file path=ppt/slides/slide2.xml><?xml version="1.0" encoding="utf-8"?>
+<p:sld xmlns:a="http://schemas.openxmlformats.org/drawingml/2006/main" xmlns:r="http://schemas.openxmlformats.org/officeDocument/2006/relationships" xmlns:p="http://schemas.openxmlformats.org/presentationml/2006/main">
+  <p:cSld>
+    <p:spTree>
+      <p:nvGrpSpPr>
+        <p:cNvPr id="1" name=""/>
+        <p:cNvGrpSpPr/>
+        <p:nvPr/>
+      </p:nvGrpSpPr>
+      <p:grpSpPr>
+        <a:xfrm>
+          <a:off x="0" y="0"/>
+          <a:ext cx="0" cy="0"/>
+          <a:chOff x="0" y="0"/>
+          <a:chExt cx="0" cy="0"/>
+        </a:xfrm>
+      </p:grpSpPr>
+      <p:sp>
+        <p:nvSpPr>
+          <p:cNvPr id="4" name="TextBox 3">
+            <a:extLst>
+              <a:ext uri="{FF2B5EF4-FFF2-40B4-BE49-F238E27FC236}">
+                <a16:creationId xmlns:a16="http://schemas.microsoft.com/office/drawing/2014/main" id="{B5E31098-DD1A-96C6-0631-32951EE6D4ED}"/>
+              </a:ext>
+            </a:extLst>
+          </p:cNvPr>
+          <p:cNvSpPr txBox="1"/>
+          <p:nvPr/>
+        </p:nvSpPr>
+        <p:spPr>
+          <a:xfrm>
+            <a:off x="1417752" y="3186838"/>
+            <a:ext cx="6445129" cy="1569660"/>
+          </a:xfrm>
+          <a:prstGeom prst="rect">
+            <a:avLst/>
+          </a:prstGeom>
+          <a:noFill/>
+        </p:spPr>
+        <p:txBody>
+          <a:bodyPr wrap="square" rtlCol="0">
+            <a:spAutoFit/>
+          </a:bodyPr>
+          <a:lstStyle/>
+          <a:p>
+            <a:pPr algn="ctr"/>
+            <a:r>
+              <a:rPr lang="en-US" sz="4800" b="0" i="0" dirty="0">
+                <a:solidFill>
+                  <a:schemeClr val="tx1">
+                    <a:lumMod val="75000"/>
+                    <a:lumOff val="25000"/>
+                  </a:schemeClr>
+                </a:solidFill>
+                <a:effectLst/>
+                <a:latin typeface="Century" panose="02040604050505020304" pitchFamily="18" charset="0"/>
+                <a:cs typeface="Arial Nova" panose="020F0502020204030204" pitchFamily="34" charset="0"/>
+              </a:rPr>
+              <a:t>MY</a:t>
+            </a:r>
+            <a:r>
+              <a:rPr lang="zh-TW" altLang="en-US" sz="4800" dirty="0">
+                <a:solidFill>
+                  <a:schemeClr val="tx1">
+                    <a:lumMod val="75000"/>
+                    <a:lumOff val="25000"/>
+                  </a:schemeClr>
+                </a:solidFill>
+                <a:latin typeface="Century" panose="02040604050505020304" pitchFamily="18" charset="0"/>
+                <a:cs typeface="Arial Nova" panose="020F0502020204030204" pitchFamily="34" charset="0"/>
+              </a:rPr>
+              <a:t> </a:t>
+            </a:r>
+            <a:r>
+              <a:rPr lang="en-US" sz="4800" b="0" i="0" dirty="0">
+                <a:solidFill>
+                  <a:schemeClr val="tx1">
+                    <a:lumMod val="75000"/>
+                    <a:lumOff val="25000"/>
+                  </a:schemeClr>
+                </a:solidFill>
+                <a:effectLst/>
+                <a:latin typeface="Century" panose="02040604050505020304" pitchFamily="18" charset="0"/>
+                <a:cs typeface="Arial Nova" panose="020F0502020204030204" pitchFamily="34" charset="0"/>
+              </a:rPr>
+              <a:t>EASY </a:t>
+            </a:r>
+          </a:p>
+          <a:p>
+            <a:pPr algn="ctr"/>
+            <a:r>
+              <a:rPr lang="en-US" sz="4800" b="0" i="0" dirty="0">
+                <a:solidFill>
+                  <a:schemeClr val="tx1">
+                    <a:lumMod val="75000"/>
+                    <a:lumOff val="25000"/>
+                  </a:schemeClr>
+                </a:solidFill>
+                <a:effectLst/>
+                <a:latin typeface="Century" panose="02040604050505020304" pitchFamily="18" charset="0"/>
+                <a:cs typeface="Arial Nova" panose="020F0502020204030204" pitchFamily="34" charset="0"/>
+              </a:rPr>
+              <a:t>VAULT</a:t>
+            </a:r>
+            <a:endParaRPr lang="en-TW" sz="4800" dirty="0">
+              <a:solidFill>
+                <a:schemeClr val="tx1">
+                  <a:lumMod val="75000"/>
+                  <a:lumOff val="25000"/>
+                </a:schemeClr>
+              </a:solidFill>
+              <a:latin typeface="Century" panose="02040604050505020304" pitchFamily="18" charset="0"/>
+              <a:cs typeface="Arial Nova" panose="020F0502020204030204" pitchFamily="34" charset="0"/>
+            </a:endParaRPr>
+          </a:p>
+        </p:txBody>
+      </p:sp>
+    </p:spTree>
+    <p:extLst>
+      <p:ext uri="{BB962C8B-B14F-4D97-AF65-F5344CB8AC3E}">
+        <p14:creationId xmlns:p14="http://schemas.microsoft.com/office/powerpoint/2010/main" val="4173549047"/>
+      </p:ext>
+    </p:extLst>
+  </p:cSld>
+  <p:clrMapOvr>
+    <a:masterClrMapping/>
+  </p:clrMapOvr>
+</p:sld>
+</file>
+
+<file path=ppt/slides/slide3.xml><?xml version="1.0" encoding="utf-8"?>
 <p:sld xmlns:a="http://schemas.openxmlformats.org/drawingml/2006/main" xmlns:r="http://schemas.openxmlformats.org/officeDocument/2006/relationships" xmlns:p="http://schemas.openxmlformats.org/presentationml/2006/main">
   <p:cSld>
     <p:spTree>

--- a/profile/intro.pptx
+++ b/profile/intro.pptx
@@ -3793,29 +3793,18 @@
           <a:p>
             <a:pPr algn="ctr"/>
             <a:r>
-              <a:rPr lang="en-US" sz="4800" b="0" i="0" dirty="0">
+              <a:rPr lang="en-TW" sz="4800" dirty="0">
                 <a:solidFill>
                   <a:schemeClr val="tx1">
                     <a:lumMod val="75000"/>
                     <a:lumOff val="25000"/>
                   </a:schemeClr>
                 </a:solidFill>
-                <a:effectLst/>
                 <a:latin typeface="Century" panose="02040604050505020304" pitchFamily="18" charset="0"/>
                 <a:cs typeface="Arial Nova" panose="020F0502020204030204" pitchFamily="34" charset="0"/>
               </a:rPr>
-              <a:t>VAULT</a:t>
-            </a:r>
-            <a:endParaRPr lang="en-TW" sz="4800" dirty="0">
-              <a:solidFill>
-                <a:schemeClr val="tx1">
-                  <a:lumMod val="75000"/>
-                  <a:lumOff val="25000"/>
-                </a:schemeClr>
-              </a:solidFill>
-              <a:latin typeface="Century" panose="02040604050505020304" pitchFamily="18" charset="0"/>
-              <a:cs typeface="Arial Nova" panose="020F0502020204030204" pitchFamily="34" charset="0"/>
-            </a:endParaRPr>
+              <a:t>SHOP</a:t>
+            </a:r>
           </a:p>
         </p:txBody>
       </p:sp>
